--- a/slaydlar/M15.pptx
+++ b/slaydlar/M15.pptx
@@ -6576,12 +6576,12 @@
         </p:nvSpPr>
         <p:spPr>
           <a:xfrm>
-            <a:off x="550000" y="1620000"/>
-            <a:ext cx="11100000" cy="1250000"/>
+            <a:off x="550000" y="1409780"/>
+            <a:ext cx="11100000" cy="1503480"/>
           </a:xfrm>
           <a:prstGeom prst="roundRect">
             <a:avLst>
-              <a:gd name="adj" fmla="val 18000"/>
+              <a:gd name="adj" fmla="val 8000"/>
             </a:avLst>
           </a:prstGeom>
           <a:solidFill>
@@ -6622,8 +6622,8 @@
         </p:nvSpPr>
         <p:spPr>
           <a:xfrm>
-            <a:off x="550000" y="1620000"/>
-            <a:ext cx="70000" cy="1250000"/>
+            <a:off x="550000" y="1409780"/>
+            <a:ext cx="70000" cy="1503480"/>
           </a:xfrm>
           <a:prstGeom prst="rect">
             <a:avLst/>
@@ -6666,8 +6666,8 @@
         </p:nvSpPr>
         <p:spPr>
           <a:xfrm>
-            <a:off x="800000" y="2015000"/>
-            <a:ext cx="460000" cy="460000"/>
+            <a:off x="780000" y="1951520"/>
+            <a:ext cx="420000" cy="420000"/>
           </a:xfrm>
           <a:prstGeom prst="ellipse">
             <a:avLst/>
@@ -6700,7 +6700,7 @@
           <a:p>
             <a:pPr algn="ctr"/>
             <a:r>
-              <a:rPr sz="1600" b="1">
+              <a:rPr sz="1400" b="1">
                 <a:solidFill>
                   <a:srgbClr val="FFFFFF"/>
                 </a:solidFill>
@@ -6719,8 +6719,8 @@
         </p:nvSpPr>
         <p:spPr>
           <a:xfrm>
-            <a:off x="1450000" y="1620000"/>
-            <a:ext cx="10050000" cy="1250000"/>
+            <a:off x="1380000" y="1449780"/>
+            <a:ext cx="10150000" cy="1423480"/>
           </a:xfrm>
           <a:prstGeom prst="rect">
             <a:avLst/>
@@ -6728,20 +6728,35 @@
           <a:noFill/>
         </p:spPr>
         <p:txBody>
-          <a:bodyPr wrap="square" anchor="ctr" lIns="50800" rIns="50800">
+          <a:bodyPr wrap="square" anchor="ctr">
             <a:spAutoFit/>
           </a:bodyPr>
           <a:lstStyle/>
           <a:p>
-            <a:pPr algn="l"/>
             <a:r>
-              <a:rPr sz="1600" b="0">
+              <a:rPr sz="1500" b="1">
                 <a:solidFill>
-                  <a:srgbClr val="1B2430"/>
+                  <a:srgbClr val="1F3A5F"/>
                 </a:solidFill>
                 <a:latin typeface="Calibri"/>
               </a:rPr>
-              <a:t>«Green AI» atamasini Schwartz va hamkasblar (2020) «Red AI» — faqat aniqlikni oshirish uchun cheksiz hisoblash sarflash — ga qarshi qo'yib kiritdilar. Ularning taklifi: ilmiy natijalar bilan birga hisoblash narxini (FLOP, parametrlar, GPU-soat, energiya, CO₂)…</a:t>
+              <a:t>«Green AI» atamasini Schwartz va hamkasblar (2020) «Red AI» — faqat aniqlikni oshirish uchun cheksiz hisoblash sarflash — ga qarshi qo'yib kiritdilar.</a:t>
+            </a:r>
+          </a:p>
+          <a:p>
+            <a:pPr>
+              <a:spcBef>
+                <a:spcPts val="400"/>
+              </a:spcBef>
+            </a:pPr>
+            <a:r>
+              <a:rPr sz="1400">
+                <a:solidFill>
+                  <a:srgbClr val="334055"/>
+                </a:solidFill>
+                <a:latin typeface="Calibri"/>
+              </a:rPr>
+              <a:t>Ularning taklifi: ilmiy natijalar bilan birga hisoblash narxini (FLOP, parametrlar, GPU-soat, energiya, CO₂) ham e'lon qilish va samaradorlikni birinchi darajali mezon qilish. Strubell va boshq.</a:t>
             </a:r>
           </a:p>
         </p:txBody>
@@ -6754,12 +6769,12 @@
         </p:nvSpPr>
         <p:spPr>
           <a:xfrm>
-            <a:off x="550000" y="2990000"/>
-            <a:ext cx="11100000" cy="1250000"/>
+            <a:off x="550000" y="3023260"/>
+            <a:ext cx="11100000" cy="1503480"/>
           </a:xfrm>
           <a:prstGeom prst="roundRect">
             <a:avLst>
-              <a:gd name="adj" fmla="val 18000"/>
+              <a:gd name="adj" fmla="val 8000"/>
             </a:avLst>
           </a:prstGeom>
           <a:solidFill>
@@ -6800,8 +6815,8 @@
         </p:nvSpPr>
         <p:spPr>
           <a:xfrm>
-            <a:off x="550000" y="2990000"/>
-            <a:ext cx="70000" cy="1250000"/>
+            <a:off x="550000" y="3023260"/>
+            <a:ext cx="70000" cy="1503480"/>
           </a:xfrm>
           <a:prstGeom prst="rect">
             <a:avLst/>
@@ -6844,8 +6859,8 @@
         </p:nvSpPr>
         <p:spPr>
           <a:xfrm>
-            <a:off x="800000" y="3385000"/>
-            <a:ext cx="460000" cy="460000"/>
+            <a:off x="780000" y="3565000"/>
+            <a:ext cx="420000" cy="420000"/>
           </a:xfrm>
           <a:prstGeom prst="ellipse">
             <a:avLst/>
@@ -6878,7 +6893,7 @@
           <a:p>
             <a:pPr algn="ctr"/>
             <a:r>
-              <a:rPr sz="1600" b="1">
+              <a:rPr sz="1400" b="1">
                 <a:solidFill>
                   <a:srgbClr val="FFFFFF"/>
                 </a:solidFill>
@@ -6897,8 +6912,8 @@
         </p:nvSpPr>
         <p:spPr>
           <a:xfrm>
-            <a:off x="1450000" y="2990000"/>
-            <a:ext cx="10050000" cy="1250000"/>
+            <a:off x="1380000" y="3063260"/>
+            <a:ext cx="10150000" cy="1423480"/>
           </a:xfrm>
           <a:prstGeom prst="rect">
             <a:avLst/>
@@ -6906,20 +6921,19 @@
           <a:noFill/>
         </p:spPr>
         <p:txBody>
-          <a:bodyPr wrap="square" anchor="ctr" lIns="50800" rIns="50800">
+          <a:bodyPr wrap="square" anchor="ctr">
             <a:spAutoFit/>
           </a:bodyPr>
           <a:lstStyle/>
           <a:p>
-            <a:pPr algn="l"/>
             <a:r>
-              <a:rPr sz="1600" b="0">
+              <a:rPr sz="1400" b="0">
                 <a:solidFill>
                   <a:srgbClr val="1B2430"/>
                 </a:solidFill>
                 <a:latin typeface="Calibri"/>
               </a:rPr>
-              <a:t>Energiya va uglerod izini baholash formulasi: E = Σ(P_qurilma × t × PUE), CO₂e = E × uglerod_intensivligi, bu yerda PUE (Power Usage Effectiveness) — ma'lumot markazining umumiy iste'molining IT iste'moliga nisbati (zamonaviy giperskeyl markazlarda 1,1–1,2,…</a:t>
+              <a:t>Energiya va uglerod izini baholash formulasi: E = Σ(P_qurilma × t × PUE), CO₂e = E × uglerod_intensivligi, bu yerda PUE (Power Usage Effectiveness) — ma'lumot markazining umumiy iste'molining IT iste'moliga nisbati (zamonaviy giperskeyl markazlarda 1,1–1,2…</a:t>
             </a:r>
           </a:p>
         </p:txBody>
@@ -6932,12 +6946,12 @@
         </p:nvSpPr>
         <p:spPr>
           <a:xfrm>
-            <a:off x="550000" y="4360000"/>
-            <a:ext cx="11100000" cy="1250000"/>
+            <a:off x="550000" y="4636740"/>
+            <a:ext cx="11100000" cy="1503480"/>
           </a:xfrm>
           <a:prstGeom prst="roundRect">
             <a:avLst>
-              <a:gd name="adj" fmla="val 18000"/>
+              <a:gd name="adj" fmla="val 8000"/>
             </a:avLst>
           </a:prstGeom>
           <a:solidFill>
@@ -6978,8 +6992,8 @@
         </p:nvSpPr>
         <p:spPr>
           <a:xfrm>
-            <a:off x="550000" y="4360000"/>
-            <a:ext cx="70000" cy="1250000"/>
+            <a:off x="550000" y="4636740"/>
+            <a:ext cx="70000" cy="1503480"/>
           </a:xfrm>
           <a:prstGeom prst="rect">
             <a:avLst/>
@@ -7022,8 +7036,8 @@
         </p:nvSpPr>
         <p:spPr>
           <a:xfrm>
-            <a:off x="800000" y="4755000"/>
-            <a:ext cx="460000" cy="460000"/>
+            <a:off x="780000" y="5178480"/>
+            <a:ext cx="420000" cy="420000"/>
           </a:xfrm>
           <a:prstGeom prst="ellipse">
             <a:avLst/>
@@ -7056,7 +7070,7 @@
           <a:p>
             <a:pPr algn="ctr"/>
             <a:r>
-              <a:rPr sz="1600" b="1">
+              <a:rPr sz="1400" b="1">
                 <a:solidFill>
                   <a:srgbClr val="FFFFFF"/>
                 </a:solidFill>
@@ -7075,8 +7089,8 @@
         </p:nvSpPr>
         <p:spPr>
           <a:xfrm>
-            <a:off x="1450000" y="4360000"/>
-            <a:ext cx="10050000" cy="1250000"/>
+            <a:off x="1380000" y="4676740"/>
+            <a:ext cx="10150000" cy="1423480"/>
           </a:xfrm>
           <a:prstGeom prst="rect">
             <a:avLst/>
@@ -7084,20 +7098,35 @@
           <a:noFill/>
         </p:spPr>
         <p:txBody>
-          <a:bodyPr wrap="square" anchor="ctr" lIns="50800" rIns="50800">
+          <a:bodyPr wrap="square" anchor="ctr">
             <a:spAutoFit/>
           </a:bodyPr>
           <a:lstStyle/>
           <a:p>
-            <a:pPr algn="l"/>
             <a:r>
-              <a:rPr sz="1600" b="0">
+              <a:rPr sz="1500" b="1">
                 <a:solidFill>
-                  <a:srgbClr val="1B2430"/>
+                  <a:srgbClr val="1F3A5F"/>
                 </a:solidFill>
                 <a:latin typeface="Calibri"/>
               </a:rPr>
               <a:t>Green AI ning muhandislik vositalari: M8 da ko'rilgan kvantlash, siyraklashtirish va distillash (energiya sarfini 2–10 baravar kamaytiradi); samarali arxitekturalar (Mixture-of-Experts — har token uchun parametrlarning faqat bir qismi faol); o'qitish…</a:t>
+            </a:r>
+          </a:p>
+          <a:p>
+            <a:pPr>
+              <a:spcBef>
+                <a:spcPts val="400"/>
+              </a:spcBef>
+            </a:pPr>
+            <a:r>
+              <a:rPr sz="1400">
+                <a:solidFill>
+                  <a:srgbClr val="334055"/>
+                </a:solidFill>
+                <a:latin typeface="Calibri"/>
+              </a:rPr>
+              <a:t>Metrikalar: samarali ish yuklama uchun TOPS/Vt, o'qitish uchun model aniqligiga erishish uchun jami kVt·soat, Green500 ro'yxatidagi GFLOPS/Vt.</a:t>
             </a:r>
           </a:p>
         </p:txBody>
@@ -9548,12 +9577,12 @@
         </p:nvSpPr>
         <p:spPr>
           <a:xfrm>
-            <a:off x="550000" y="1300000"/>
-            <a:ext cx="11100000" cy="1147500"/>
+            <a:off x="550000" y="1250000"/>
+            <a:ext cx="11100000" cy="1180000"/>
           </a:xfrm>
           <a:prstGeom prst="roundRect">
             <a:avLst>
-              <a:gd name="adj" fmla="val 18000"/>
+              <a:gd name="adj" fmla="val 8000"/>
             </a:avLst>
           </a:prstGeom>
           <a:solidFill>
@@ -9594,8 +9623,8 @@
         </p:nvSpPr>
         <p:spPr>
           <a:xfrm>
-            <a:off x="550000" y="1300000"/>
-            <a:ext cx="70000" cy="1147500"/>
+            <a:off x="550000" y="1250000"/>
+            <a:ext cx="70000" cy="1180000"/>
           </a:xfrm>
           <a:prstGeom prst="rect">
             <a:avLst/>
@@ -9638,8 +9667,8 @@
         </p:nvSpPr>
         <p:spPr>
           <a:xfrm>
-            <a:off x="800000" y="1643750"/>
-            <a:ext cx="460000" cy="460000"/>
+            <a:off x="780000" y="1630000"/>
+            <a:ext cx="420000" cy="420000"/>
           </a:xfrm>
           <a:prstGeom prst="ellipse">
             <a:avLst/>
@@ -9672,7 +9701,7 @@
           <a:p>
             <a:pPr algn="ctr"/>
             <a:r>
-              <a:rPr sz="1600" b="1">
+              <a:rPr sz="1400" b="1">
                 <a:solidFill>
                   <a:srgbClr val="FFFFFF"/>
                 </a:solidFill>
@@ -9691,8 +9720,8 @@
         </p:nvSpPr>
         <p:spPr>
           <a:xfrm>
-            <a:off x="1450000" y="1300000"/>
-            <a:ext cx="10050000" cy="1147500"/>
+            <a:off x="1380000" y="1290000"/>
+            <a:ext cx="10150000" cy="1100000"/>
           </a:xfrm>
           <a:prstGeom prst="rect">
             <a:avLst/>
@@ -9700,22 +9729,37 @@
           <a:noFill/>
         </p:spPr>
         <p:txBody>
-          <a:bodyPr wrap="square" anchor="ctr" lIns="50800" rIns="50800">
+          <a:bodyPr wrap="square" anchor="ctr">
             <a:spAutoFit/>
           </a:bodyPr>
           <a:lstStyle/>
           <a:p>
-            <a:pPr algn="l"/>
             <a:r>
-              <a:rPr sz="1600" b="0">
+              <a:rPr sz="1500" b="1">
                 <a:solidFill>
-                  <a:srgbClr val="1B2430"/>
+                  <a:srgbClr val="1F3A5F"/>
                 </a:solidFill>
                 <a:latin typeface="Calibri"/>
               </a:rPr>
               <a:t>Zamonaviy SI superkompyuterlari ikki sinfga bo'linadi.</a:t>
             </a:r>
           </a:p>
+          <a:p>
+            <a:pPr>
+              <a:spcBef>
+                <a:spcPts val="400"/>
+              </a:spcBef>
+            </a:pPr>
+            <a:r>
+              <a:rPr sz="1400">
+                <a:solidFill>
+                  <a:srgbClr val="334055"/>
+                </a:solidFill>
+                <a:latin typeface="Calibri"/>
+              </a:rPr>
+              <a:t>Davlat ilmiy eksaflops tizimlari: Frontier (ORNL, 2022, AMD MI250X, HPL 1,2 eksaflops), Aurora (Argonne, Intel Ponte Vecchio), El Capitan (LLNL, 2024-yil noyabridan TOP500 birinchisi, AMD MI300A APU, HPL 1,74 eksaflops, ~30 MVt) va Yevropaning birinchi eksaflops tizimi JUPITER (Yulix, 2025, NVIDIA Grace Hopper, modulli arxitektura).</a:t>
+            </a:r>
+          </a:p>
         </p:txBody>
       </p:sp>
       <p:sp>
@@ -9726,12 +9770,12 @@
         </p:nvSpPr>
         <p:spPr>
           <a:xfrm>
-            <a:off x="550000" y="2567500"/>
-            <a:ext cx="11100000" cy="1147500"/>
+            <a:off x="550000" y="2540000"/>
+            <a:ext cx="11100000" cy="1180000"/>
           </a:xfrm>
           <a:prstGeom prst="roundRect">
             <a:avLst>
-              <a:gd name="adj" fmla="val 18000"/>
+              <a:gd name="adj" fmla="val 8000"/>
             </a:avLst>
           </a:prstGeom>
           <a:solidFill>
@@ -9772,8 +9816,8 @@
         </p:nvSpPr>
         <p:spPr>
           <a:xfrm>
-            <a:off x="550000" y="2567500"/>
-            <a:ext cx="70000" cy="1147500"/>
+            <a:off x="550000" y="2540000"/>
+            <a:ext cx="70000" cy="1180000"/>
           </a:xfrm>
           <a:prstGeom prst="rect">
             <a:avLst/>
@@ -9816,8 +9860,8 @@
         </p:nvSpPr>
         <p:spPr>
           <a:xfrm>
-            <a:off x="800000" y="2911250"/>
-            <a:ext cx="460000" cy="460000"/>
+            <a:off x="780000" y="2920000"/>
+            <a:ext cx="420000" cy="420000"/>
           </a:xfrm>
           <a:prstGeom prst="ellipse">
             <a:avLst/>
@@ -9850,7 +9894,7 @@
           <a:p>
             <a:pPr algn="ctr"/>
             <a:r>
-              <a:rPr sz="1600" b="1">
+              <a:rPr sz="1400" b="1">
                 <a:solidFill>
                   <a:srgbClr val="FFFFFF"/>
                 </a:solidFill>
@@ -9869,8 +9913,8 @@
         </p:nvSpPr>
         <p:spPr>
           <a:xfrm>
-            <a:off x="1450000" y="2567500"/>
-            <a:ext cx="10050000" cy="1147500"/>
+            <a:off x="1380000" y="2580000"/>
+            <a:ext cx="10150000" cy="1100000"/>
           </a:xfrm>
           <a:prstGeom prst="rect">
             <a:avLst/>
@@ -9878,20 +9922,19 @@
           <a:noFill/>
         </p:spPr>
         <p:txBody>
-          <a:bodyPr wrap="square" anchor="ctr" lIns="50800" rIns="50800">
+          <a:bodyPr wrap="square" anchor="ctr">
             <a:spAutoFit/>
           </a:bodyPr>
           <a:lstStyle/>
           <a:p>
-            <a:pPr algn="l"/>
             <a:r>
-              <a:rPr sz="1600" b="0">
+              <a:rPr sz="1400" b="0">
                 <a:solidFill>
                   <a:srgbClr val="1B2430"/>
                 </a:solidFill>
                 <a:latin typeface="Calibri"/>
               </a:rPr>
-              <a:t>Bu tizimlarning arxitekturaviy tendensiyalari: CPU va GPU ning yagona paketda birlashishi (Grace Hopper, MI300A) va HBM3e xotirasi (H200 da 141 GB, 4,8 TB/s); rafdan tashqari…</a:t>
+              <a:t>Bu tizimlarning arxitekturaviy tendensiyalari: CPU va GPU ning yagona paketda birlashishi (Grace Hopper, MI300A) va HBM3e xotirasi (H200 da 141 GB, 4,8 TB/s); rafdan tashqari masshtablanadigan NVLink domenlari (GB200 NVL72 — 72 GPU bitta xotira makonida, 130…</a:t>
             </a:r>
           </a:p>
         </p:txBody>
@@ -9904,12 +9947,12 @@
         </p:nvSpPr>
         <p:spPr>
           <a:xfrm>
-            <a:off x="550000" y="3835000"/>
-            <a:ext cx="11100000" cy="1147500"/>
+            <a:off x="550000" y="3830000"/>
+            <a:ext cx="11100000" cy="1180000"/>
           </a:xfrm>
           <a:prstGeom prst="roundRect">
             <a:avLst>
-              <a:gd name="adj" fmla="val 18000"/>
+              <a:gd name="adj" fmla="val 8000"/>
             </a:avLst>
           </a:prstGeom>
           <a:solidFill>
@@ -9950,8 +9993,8 @@
         </p:nvSpPr>
         <p:spPr>
           <a:xfrm>
-            <a:off x="550000" y="3835000"/>
-            <a:ext cx="70000" cy="1147500"/>
+            <a:off x="550000" y="3830000"/>
+            <a:ext cx="70000" cy="1180000"/>
           </a:xfrm>
           <a:prstGeom prst="rect">
             <a:avLst/>
@@ -9994,8 +10037,8 @@
         </p:nvSpPr>
         <p:spPr>
           <a:xfrm>
-            <a:off x="800000" y="4178750"/>
-            <a:ext cx="460000" cy="460000"/>
+            <a:off x="780000" y="4210000"/>
+            <a:ext cx="420000" cy="420000"/>
           </a:xfrm>
           <a:prstGeom prst="ellipse">
             <a:avLst/>
@@ -10028,7 +10071,7 @@
           <a:p>
             <a:pPr algn="ctr"/>
             <a:r>
-              <a:rPr sz="1600" b="1">
+              <a:rPr sz="1400" b="1">
                 <a:solidFill>
                   <a:srgbClr val="FFFFFF"/>
                 </a:solidFill>
@@ -10047,8 +10090,8 @@
         </p:nvSpPr>
         <p:spPr>
           <a:xfrm>
-            <a:off x="1450000" y="3835000"/>
-            <a:ext cx="10050000" cy="1147500"/>
+            <a:off x="1380000" y="3870000"/>
+            <a:ext cx="10150000" cy="1100000"/>
           </a:xfrm>
           <a:prstGeom prst="rect">
             <a:avLst/>
@@ -10056,22 +10099,37 @@
           <a:noFill/>
         </p:spPr>
         <p:txBody>
-          <a:bodyPr wrap="square" anchor="ctr" lIns="50800" rIns="50800">
+          <a:bodyPr wrap="square" anchor="ctr">
             <a:spAutoFit/>
           </a:bodyPr>
           <a:lstStyle/>
           <a:p>
-            <a:pPr algn="l"/>
             <a:r>
-              <a:rPr sz="1600" b="0">
+              <a:rPr sz="1500" b="1">
                 <a:solidFill>
-                  <a:srgbClr val="1B2430"/>
+                  <a:srgbClr val="1F3A5F"/>
                 </a:solidFill>
                 <a:latin typeface="Calibri"/>
               </a:rPr>
               <a:t>Kelajak avlod tezlatkichlari bir nechta yo'nalishda rivojlanmoqda.</a:t>
             </a:r>
           </a:p>
+          <a:p>
+            <a:pPr>
+              <a:spcBef>
+                <a:spcPts val="400"/>
+              </a:spcBef>
+            </a:pPr>
+            <a:r>
+              <a:rPr sz="1400">
+                <a:solidFill>
+                  <a:srgbClr val="334055"/>
+                </a:solidFill>
+                <a:latin typeface="Calibri"/>
+              </a:rPr>
+              <a:t>Pufak (wafer-scale) integratsiya: Cerebras WSE-3 (2024) — 46 225 mm² kremniy, 4 trillion tranzistor, 900 ming yadro, 44 GB chipda SRAM, 21 PB/s xotira o'tkazuvchanligi — xotira devorini butun modelni chipda saqlash orqali yengadi. Ma'lumot oqimli arxitekturalar: Groq LPU (deterministik, SRAM-markazli, LLM inferensida tokeniga past kechikish), SambaNova SN40L.</a:t>
+            </a:r>
+          </a:p>
         </p:txBody>
       </p:sp>
       <p:sp>
@@ -10082,12 +10140,12 @@
         </p:nvSpPr>
         <p:spPr>
           <a:xfrm>
-            <a:off x="550000" y="5102500"/>
-            <a:ext cx="11100000" cy="1147500"/>
+            <a:off x="550000" y="5120000"/>
+            <a:ext cx="11100000" cy="1180000"/>
           </a:xfrm>
           <a:prstGeom prst="roundRect">
             <a:avLst>
-              <a:gd name="adj" fmla="val 18000"/>
+              <a:gd name="adj" fmla="val 8000"/>
             </a:avLst>
           </a:prstGeom>
           <a:solidFill>
@@ -10128,8 +10186,8 @@
         </p:nvSpPr>
         <p:spPr>
           <a:xfrm>
-            <a:off x="550000" y="5102500"/>
-            <a:ext cx="70000" cy="1147500"/>
+            <a:off x="550000" y="5120000"/>
+            <a:ext cx="70000" cy="1180000"/>
           </a:xfrm>
           <a:prstGeom prst="rect">
             <a:avLst/>
@@ -10172,8 +10230,8 @@
         </p:nvSpPr>
         <p:spPr>
           <a:xfrm>
-            <a:off x="800000" y="5446250"/>
-            <a:ext cx="460000" cy="460000"/>
+            <a:off x="780000" y="5500000"/>
+            <a:ext cx="420000" cy="420000"/>
           </a:xfrm>
           <a:prstGeom prst="ellipse">
             <a:avLst/>
@@ -10206,7 +10264,7 @@
           <a:p>
             <a:pPr algn="ctr"/>
             <a:r>
-              <a:rPr sz="1600" b="1">
+              <a:rPr sz="1400" b="1">
                 <a:solidFill>
                   <a:srgbClr val="FFFFFF"/>
                 </a:solidFill>
@@ -10225,8 +10283,8 @@
         </p:nvSpPr>
         <p:spPr>
           <a:xfrm>
-            <a:off x="1450000" y="5102500"/>
-            <a:ext cx="10050000" cy="1147500"/>
+            <a:off x="1380000" y="5160000"/>
+            <a:ext cx="10150000" cy="1100000"/>
           </a:xfrm>
           <a:prstGeom prst="rect">
             <a:avLst/>
@@ -10234,14 +10292,13 @@
           <a:noFill/>
         </p:spPr>
         <p:txBody>
-          <a:bodyPr wrap="square" anchor="ctr" lIns="50800" rIns="50800">
+          <a:bodyPr wrap="square" anchor="ctr">
             <a:spAutoFit/>
           </a:bodyPr>
           <a:lstStyle/>
           <a:p>
-            <a:pPr algn="l"/>
             <a:r>
-              <a:rPr sz="1600" b="0">
+              <a:rPr sz="1400" b="0">
                 <a:solidFill>
                   <a:srgbClr val="1B2430"/>
                 </a:solidFill>
@@ -13913,8 +13970,8 @@
         </p:nvSpPr>
         <p:spPr>
           <a:xfrm>
-            <a:off x="550000" y="1300000"/>
-            <a:ext cx="11100000" cy="894000"/>
+            <a:off x="550000" y="2255000"/>
+            <a:ext cx="11100000" cy="520000"/>
           </a:xfrm>
           <a:prstGeom prst="roundRect">
             <a:avLst>
@@ -13959,8 +14016,8 @@
         </p:nvSpPr>
         <p:spPr>
           <a:xfrm>
-            <a:off x="550000" y="1300000"/>
-            <a:ext cx="70000" cy="894000"/>
+            <a:off x="550000" y="2255000"/>
+            <a:ext cx="70000" cy="520000"/>
           </a:xfrm>
           <a:prstGeom prst="rect">
             <a:avLst/>
@@ -14003,8 +14060,8 @@
         </p:nvSpPr>
         <p:spPr>
           <a:xfrm>
-            <a:off x="800000" y="1517000"/>
-            <a:ext cx="460000" cy="460000"/>
+            <a:off x="780000" y="2325000"/>
+            <a:ext cx="380000" cy="380000"/>
           </a:xfrm>
           <a:prstGeom prst="ellipse">
             <a:avLst/>
@@ -14037,7 +14094,7 @@
           <a:p>
             <a:pPr algn="ctr"/>
             <a:r>
-              <a:rPr sz="1600" b="1">
+              <a:rPr sz="1400" b="1">
                 <a:solidFill>
                   <a:srgbClr val="FFFFFF"/>
                 </a:solidFill>
@@ -14056,8 +14113,8 @@
         </p:nvSpPr>
         <p:spPr>
           <a:xfrm>
-            <a:off x="1450000" y="1300000"/>
-            <a:ext cx="10050000" cy="894000"/>
+            <a:off x="1380000" y="2295000"/>
+            <a:ext cx="10150000" cy="440000"/>
           </a:xfrm>
           <a:prstGeom prst="rect">
             <a:avLst/>
@@ -14065,14 +14122,13 @@
           <a:noFill/>
         </p:spPr>
         <p:txBody>
-          <a:bodyPr wrap="square" anchor="ctr" lIns="50800" rIns="50800">
+          <a:bodyPr wrap="square" anchor="ctr">
             <a:spAutoFit/>
           </a:bodyPr>
           <a:lstStyle/>
           <a:p>
-            <a:pPr algn="l"/>
             <a:r>
-              <a:rPr sz="1900" b="0">
+              <a:rPr sz="1600" b="0">
                 <a:solidFill>
                   <a:srgbClr val="1B2430"/>
                 </a:solidFill>
@@ -14091,8 +14147,8 @@
         </p:nvSpPr>
         <p:spPr>
           <a:xfrm>
-            <a:off x="550000" y="2314000"/>
-            <a:ext cx="11100000" cy="894000"/>
+            <a:off x="550000" y="2885000"/>
+            <a:ext cx="11100000" cy="520000"/>
           </a:xfrm>
           <a:prstGeom prst="roundRect">
             <a:avLst>
@@ -14137,8 +14193,8 @@
         </p:nvSpPr>
         <p:spPr>
           <a:xfrm>
-            <a:off x="550000" y="2314000"/>
-            <a:ext cx="70000" cy="894000"/>
+            <a:off x="550000" y="2885000"/>
+            <a:ext cx="70000" cy="520000"/>
           </a:xfrm>
           <a:prstGeom prst="rect">
             <a:avLst/>
@@ -14181,8 +14237,8 @@
         </p:nvSpPr>
         <p:spPr>
           <a:xfrm>
-            <a:off x="800000" y="2531000"/>
-            <a:ext cx="460000" cy="460000"/>
+            <a:off x="780000" y="2955000"/>
+            <a:ext cx="380000" cy="380000"/>
           </a:xfrm>
           <a:prstGeom prst="ellipse">
             <a:avLst/>
@@ -14215,7 +14271,7 @@
           <a:p>
             <a:pPr algn="ctr"/>
             <a:r>
-              <a:rPr sz="1600" b="1">
+              <a:rPr sz="1400" b="1">
                 <a:solidFill>
                   <a:srgbClr val="FFFFFF"/>
                 </a:solidFill>
@@ -14234,8 +14290,8 @@
         </p:nvSpPr>
         <p:spPr>
           <a:xfrm>
-            <a:off x="1450000" y="2314000"/>
-            <a:ext cx="10050000" cy="894000"/>
+            <a:off x="1380000" y="2925000"/>
+            <a:ext cx="10150000" cy="440000"/>
           </a:xfrm>
           <a:prstGeom prst="rect">
             <a:avLst/>
@@ -14243,14 +14299,13 @@
           <a:noFill/>
         </p:spPr>
         <p:txBody>
-          <a:bodyPr wrap="square" anchor="ctr" lIns="50800" rIns="50800">
+          <a:bodyPr wrap="square" anchor="ctr">
             <a:spAutoFit/>
           </a:bodyPr>
           <a:lstStyle/>
           <a:p>
-            <a:pPr algn="l"/>
             <a:r>
-              <a:rPr sz="1900" b="0">
+              <a:rPr sz="1600" b="0">
                 <a:solidFill>
                   <a:srgbClr val="1B2430"/>
                 </a:solidFill>
@@ -14269,8 +14324,8 @@
         </p:nvSpPr>
         <p:spPr>
           <a:xfrm>
-            <a:off x="550000" y="3328000"/>
-            <a:ext cx="11100000" cy="894000"/>
+            <a:off x="550000" y="3515000"/>
+            <a:ext cx="11100000" cy="520000"/>
           </a:xfrm>
           <a:prstGeom prst="roundRect">
             <a:avLst>
@@ -14315,8 +14370,8 @@
         </p:nvSpPr>
         <p:spPr>
           <a:xfrm>
-            <a:off x="550000" y="3328000"/>
-            <a:ext cx="70000" cy="894000"/>
+            <a:off x="550000" y="3515000"/>
+            <a:ext cx="70000" cy="520000"/>
           </a:xfrm>
           <a:prstGeom prst="rect">
             <a:avLst/>
@@ -14359,8 +14414,8 @@
         </p:nvSpPr>
         <p:spPr>
           <a:xfrm>
-            <a:off x="800000" y="3545000"/>
-            <a:ext cx="460000" cy="460000"/>
+            <a:off x="780000" y="3585000"/>
+            <a:ext cx="380000" cy="380000"/>
           </a:xfrm>
           <a:prstGeom prst="ellipse">
             <a:avLst/>
@@ -14393,7 +14448,7 @@
           <a:p>
             <a:pPr algn="ctr"/>
             <a:r>
-              <a:rPr sz="1600" b="1">
+              <a:rPr sz="1400" b="1">
                 <a:solidFill>
                   <a:srgbClr val="FFFFFF"/>
                 </a:solidFill>
@@ -14412,8 +14467,8 @@
         </p:nvSpPr>
         <p:spPr>
           <a:xfrm>
-            <a:off x="1450000" y="3328000"/>
-            <a:ext cx="10050000" cy="894000"/>
+            <a:off x="1380000" y="3555000"/>
+            <a:ext cx="10150000" cy="440000"/>
           </a:xfrm>
           <a:prstGeom prst="rect">
             <a:avLst/>
@@ -14421,14 +14476,13 @@
           <a:noFill/>
         </p:spPr>
         <p:txBody>
-          <a:bodyPr wrap="square" anchor="ctr" lIns="50800" rIns="50800">
+          <a:bodyPr wrap="square" anchor="ctr">
             <a:spAutoFit/>
           </a:bodyPr>
           <a:lstStyle/>
           <a:p>
-            <a:pPr algn="l"/>
             <a:r>
-              <a:rPr sz="1900" b="0">
+              <a:rPr sz="1600" b="0">
                 <a:solidFill>
                   <a:srgbClr val="1B2430"/>
                 </a:solidFill>
@@ -14447,8 +14501,8 @@
         </p:nvSpPr>
         <p:spPr>
           <a:xfrm>
-            <a:off x="550000" y="4342000"/>
-            <a:ext cx="11100000" cy="894000"/>
+            <a:off x="550000" y="4145000"/>
+            <a:ext cx="11100000" cy="520000"/>
           </a:xfrm>
           <a:prstGeom prst="roundRect">
             <a:avLst>
@@ -14493,8 +14547,8 @@
         </p:nvSpPr>
         <p:spPr>
           <a:xfrm>
-            <a:off x="550000" y="4342000"/>
-            <a:ext cx="70000" cy="894000"/>
+            <a:off x="550000" y="4145000"/>
+            <a:ext cx="70000" cy="520000"/>
           </a:xfrm>
           <a:prstGeom prst="rect">
             <a:avLst/>
@@ -14537,8 +14591,8 @@
         </p:nvSpPr>
         <p:spPr>
           <a:xfrm>
-            <a:off x="800000" y="4559000"/>
-            <a:ext cx="460000" cy="460000"/>
+            <a:off x="780000" y="4215000"/>
+            <a:ext cx="380000" cy="380000"/>
           </a:xfrm>
           <a:prstGeom prst="ellipse">
             <a:avLst/>
@@ -14571,7 +14625,7 @@
           <a:p>
             <a:pPr algn="ctr"/>
             <a:r>
-              <a:rPr sz="1600" b="1">
+              <a:rPr sz="1400" b="1">
                 <a:solidFill>
                   <a:srgbClr val="FFFFFF"/>
                 </a:solidFill>
@@ -14590,8 +14644,8 @@
         </p:nvSpPr>
         <p:spPr>
           <a:xfrm>
-            <a:off x="1450000" y="4342000"/>
-            <a:ext cx="10050000" cy="894000"/>
+            <a:off x="1380000" y="4185000"/>
+            <a:ext cx="10150000" cy="440000"/>
           </a:xfrm>
           <a:prstGeom prst="rect">
             <a:avLst/>
@@ -14599,14 +14653,13 @@
           <a:noFill/>
         </p:spPr>
         <p:txBody>
-          <a:bodyPr wrap="square" anchor="ctr" lIns="50800" rIns="50800">
+          <a:bodyPr wrap="square" anchor="ctr">
             <a:spAutoFit/>
           </a:bodyPr>
           <a:lstStyle/>
           <a:p>
-            <a:pPr algn="l"/>
             <a:r>
-              <a:rPr sz="1900" b="0">
+              <a:rPr sz="1600" b="0">
                 <a:solidFill>
                   <a:srgbClr val="1B2430"/>
                 </a:solidFill>
@@ -14625,8 +14678,8 @@
         </p:nvSpPr>
         <p:spPr>
           <a:xfrm>
-            <a:off x="550000" y="5356000"/>
-            <a:ext cx="11100000" cy="894000"/>
+            <a:off x="550000" y="4775000"/>
+            <a:ext cx="11100000" cy="520000"/>
           </a:xfrm>
           <a:prstGeom prst="roundRect">
             <a:avLst>
@@ -14671,8 +14724,8 @@
         </p:nvSpPr>
         <p:spPr>
           <a:xfrm>
-            <a:off x="550000" y="5356000"/>
-            <a:ext cx="70000" cy="894000"/>
+            <a:off x="550000" y="4775000"/>
+            <a:ext cx="70000" cy="520000"/>
           </a:xfrm>
           <a:prstGeom prst="rect">
             <a:avLst/>
@@ -14715,8 +14768,8 @@
         </p:nvSpPr>
         <p:spPr>
           <a:xfrm>
-            <a:off x="800000" y="5573000"/>
-            <a:ext cx="460000" cy="460000"/>
+            <a:off x="780000" y="4845000"/>
+            <a:ext cx="380000" cy="380000"/>
           </a:xfrm>
           <a:prstGeom prst="ellipse">
             <a:avLst/>
@@ -14749,7 +14802,7 @@
           <a:p>
             <a:pPr algn="ctr"/>
             <a:r>
-              <a:rPr sz="1600" b="1">
+              <a:rPr sz="1400" b="1">
                 <a:solidFill>
                   <a:srgbClr val="FFFFFF"/>
                 </a:solidFill>
@@ -14768,8 +14821,8 @@
         </p:nvSpPr>
         <p:spPr>
           <a:xfrm>
-            <a:off x="1450000" y="5356000"/>
-            <a:ext cx="10050000" cy="894000"/>
+            <a:off x="1380000" y="4815000"/>
+            <a:ext cx="10150000" cy="440000"/>
           </a:xfrm>
           <a:prstGeom prst="rect">
             <a:avLst/>
@@ -14777,14 +14830,13 @@
           <a:noFill/>
         </p:spPr>
         <p:txBody>
-          <a:bodyPr wrap="square" anchor="ctr" lIns="50800" rIns="50800">
+          <a:bodyPr wrap="square" anchor="ctr">
             <a:spAutoFit/>
           </a:bodyPr>
           <a:lstStyle/>
           <a:p>
-            <a:pPr algn="l"/>
             <a:r>
-              <a:rPr sz="1900" b="0">
+              <a:rPr sz="1600" b="0">
                 <a:solidFill>
                   <a:srgbClr val="1B2430"/>
                 </a:solidFill>
@@ -17969,12 +18021,12 @@
         </p:nvSpPr>
         <p:spPr>
           <a:xfrm>
-            <a:off x="550000" y="1300000"/>
-            <a:ext cx="11100000" cy="1147500"/>
+            <a:off x="550000" y="1250000"/>
+            <a:ext cx="11100000" cy="1180000"/>
           </a:xfrm>
           <a:prstGeom prst="roundRect">
             <a:avLst>
-              <a:gd name="adj" fmla="val 18000"/>
+              <a:gd name="adj" fmla="val 8000"/>
             </a:avLst>
           </a:prstGeom>
           <a:solidFill>
@@ -18015,8 +18067,8 @@
         </p:nvSpPr>
         <p:spPr>
           <a:xfrm>
-            <a:off x="550000" y="1300000"/>
-            <a:ext cx="70000" cy="1147500"/>
+            <a:off x="550000" y="1250000"/>
+            <a:ext cx="70000" cy="1180000"/>
           </a:xfrm>
           <a:prstGeom prst="rect">
             <a:avLst/>
@@ -18059,8 +18111,8 @@
         </p:nvSpPr>
         <p:spPr>
           <a:xfrm>
-            <a:off x="800000" y="1643750"/>
-            <a:ext cx="460000" cy="460000"/>
+            <a:off x="780000" y="1630000"/>
+            <a:ext cx="420000" cy="420000"/>
           </a:xfrm>
           <a:prstGeom prst="ellipse">
             <a:avLst/>
@@ -18093,7 +18145,7 @@
           <a:p>
             <a:pPr algn="ctr"/>
             <a:r>
-              <a:rPr sz="1600" b="1">
+              <a:rPr sz="1400" b="1">
                 <a:solidFill>
                   <a:srgbClr val="FFFFFF"/>
                 </a:solidFill>
@@ -18112,8 +18164,8 @@
         </p:nvSpPr>
         <p:spPr>
           <a:xfrm>
-            <a:off x="1450000" y="1300000"/>
-            <a:ext cx="10050000" cy="1147500"/>
+            <a:off x="1380000" y="1290000"/>
+            <a:ext cx="10150000" cy="1100000"/>
           </a:xfrm>
           <a:prstGeom prst="rect">
             <a:avLst/>
@@ -18121,20 +18173,35 @@
           <a:noFill/>
         </p:spPr>
         <p:txBody>
-          <a:bodyPr wrap="square" anchor="ctr" lIns="50800" rIns="50800">
+          <a:bodyPr wrap="square" anchor="ctr">
             <a:spAutoFit/>
           </a:bodyPr>
           <a:lstStyle/>
           <a:p>
-            <a:pPr algn="l"/>
             <a:r>
-              <a:rPr sz="1400" b="0">
+              <a:rPr sz="1500" b="1">
                 <a:solidFill>
-                  <a:srgbClr val="1B2430"/>
+                  <a:srgbClr val="1F3A5F"/>
                 </a:solidFill>
                 <a:latin typeface="Calibri"/>
               </a:rPr>
-              <a:t>Neyromorf muhandislik atamasini 1980-yillar oxirida Karver Mid (Carver Mead) Kaltexda kiritgan: u analog CMOS sxemalar bilan biologik neyronlarning dinamikasini bevosita taqlid qilishni…</a:t>
+              <a:t>Neyromorf muhandislik atamasini 1980-yillar oxirida Karver Mid (Carver Mead) Kaltexda kiritgan: u analog CMOS sxemalar bilan biologik neyronlarning dinamikasini bevosita taqlid qilishni taklif qilgan.</a:t>
+            </a:r>
+          </a:p>
+          <a:p>
+            <a:pPr>
+              <a:spcBef>
+                <a:spcPts val="400"/>
+              </a:spcBef>
+            </a:pPr>
+            <a:r>
+              <a:rPr sz="1400">
+                <a:solidFill>
+                  <a:srgbClr val="334055"/>
+                </a:solidFill>
+                <a:latin typeface="Calibri"/>
+              </a:rPr>
+              <a:t>Zamonaviy neyromorf tizimlar uchta tamoyilga tayanadi.</a:t>
             </a:r>
           </a:p>
         </p:txBody>
@@ -18147,12 +18214,12 @@
         </p:nvSpPr>
         <p:spPr>
           <a:xfrm>
-            <a:off x="550000" y="2567500"/>
-            <a:ext cx="11100000" cy="1147500"/>
+            <a:off x="550000" y="2540000"/>
+            <a:ext cx="11100000" cy="1180000"/>
           </a:xfrm>
           <a:prstGeom prst="roundRect">
             <a:avLst>
-              <a:gd name="adj" fmla="val 18000"/>
+              <a:gd name="adj" fmla="val 8000"/>
             </a:avLst>
           </a:prstGeom>
           <a:solidFill>
@@ -18193,8 +18260,8 @@
         </p:nvSpPr>
         <p:spPr>
           <a:xfrm>
-            <a:off x="550000" y="2567500"/>
-            <a:ext cx="70000" cy="1147500"/>
+            <a:off x="550000" y="2540000"/>
+            <a:ext cx="70000" cy="1180000"/>
           </a:xfrm>
           <a:prstGeom prst="rect">
             <a:avLst/>
@@ -18237,8 +18304,8 @@
         </p:nvSpPr>
         <p:spPr>
           <a:xfrm>
-            <a:off x="800000" y="2911250"/>
-            <a:ext cx="460000" cy="460000"/>
+            <a:off x="780000" y="2920000"/>
+            <a:ext cx="420000" cy="420000"/>
           </a:xfrm>
           <a:prstGeom prst="ellipse">
             <a:avLst/>
@@ -18271,7 +18338,7 @@
           <a:p>
             <a:pPr algn="ctr"/>
             <a:r>
-              <a:rPr sz="1600" b="1">
+              <a:rPr sz="1400" b="1">
                 <a:solidFill>
                   <a:srgbClr val="FFFFFF"/>
                 </a:solidFill>
@@ -18290,8 +18357,8 @@
         </p:nvSpPr>
         <p:spPr>
           <a:xfrm>
-            <a:off x="1450000" y="2567500"/>
-            <a:ext cx="10050000" cy="1147500"/>
+            <a:off x="1380000" y="2580000"/>
+            <a:ext cx="10150000" cy="1100000"/>
           </a:xfrm>
           <a:prstGeom prst="rect">
             <a:avLst/>
@@ -18299,20 +18366,35 @@
           <a:noFill/>
         </p:spPr>
         <p:txBody>
-          <a:bodyPr wrap="square" anchor="ctr" lIns="50800" rIns="50800">
+          <a:bodyPr wrap="square" anchor="ctr">
             <a:spAutoFit/>
           </a:bodyPr>
           <a:lstStyle/>
           <a:p>
-            <a:pPr algn="l"/>
             <a:r>
-              <a:rPr sz="1400" b="0">
+              <a:rPr sz="1500" b="1">
                 <a:solidFill>
-                  <a:srgbClr val="1B2430"/>
+                  <a:srgbClr val="1F3A5F"/>
                 </a:solidFill>
                 <a:latin typeface="Calibri"/>
               </a:rPr>
-              <a:t>Asosiy neyron modeli — oqish-integratsiya-otilish (Leaky Integrate-and-Fire, LIF) neyroni: membrana potensiali U[t] = β·U[t-1] + W·X[t] - S[t-1]·θ, bu yerda β — oqish koeffitsienti, W·X —…</a:t>
+              <a:t>Asosiy neyron modeli — oqish-integratsiya-otilish (Leaky Integrate-and-Fire, LIF) neyroni: membrana potensiali U[t] = β·U[t-1] + W·X[t] - S[t-1]·θ, bu yerda β — oqish koeffitsienti, W·X — vaznlangan kirish, S — spayk (1 yoki 0), θ — chegara.</a:t>
+            </a:r>
+          </a:p>
+          <a:p>
+            <a:pPr>
+              <a:spcBef>
+                <a:spcPts val="400"/>
+              </a:spcBef>
+            </a:pPr>
+            <a:r>
+              <a:rPr sz="1400">
+                <a:solidFill>
+                  <a:srgbClr val="334055"/>
+                </a:solidFill>
+                <a:latin typeface="Calibri"/>
+              </a:rPr>
+              <a:t>Spayk U chegaradan oshganda chiqadi va potensial qaytariladi. Axborot spayk chastotasida (rate coding), spayk vaqtida (temporal/latency coding) yoki populyatsiya kodida ifodalanadi.</a:t>
             </a:r>
           </a:p>
         </p:txBody>
@@ -18325,12 +18407,12 @@
         </p:nvSpPr>
         <p:spPr>
           <a:xfrm>
-            <a:off x="550000" y="3835000"/>
-            <a:ext cx="11100000" cy="1147500"/>
+            <a:off x="550000" y="3830000"/>
+            <a:ext cx="11100000" cy="1180000"/>
           </a:xfrm>
           <a:prstGeom prst="roundRect">
             <a:avLst>
-              <a:gd name="adj" fmla="val 18000"/>
+              <a:gd name="adj" fmla="val 8000"/>
             </a:avLst>
           </a:prstGeom>
           <a:solidFill>
@@ -18371,8 +18453,8 @@
         </p:nvSpPr>
         <p:spPr>
           <a:xfrm>
-            <a:off x="550000" y="3835000"/>
-            <a:ext cx="70000" cy="1147500"/>
+            <a:off x="550000" y="3830000"/>
+            <a:ext cx="70000" cy="1180000"/>
           </a:xfrm>
           <a:prstGeom prst="rect">
             <a:avLst/>
@@ -18415,8 +18497,8 @@
         </p:nvSpPr>
         <p:spPr>
           <a:xfrm>
-            <a:off x="800000" y="4178750"/>
-            <a:ext cx="460000" cy="460000"/>
+            <a:off x="780000" y="4210000"/>
+            <a:ext cx="420000" cy="420000"/>
           </a:xfrm>
           <a:prstGeom prst="ellipse">
             <a:avLst/>
@@ -18449,7 +18531,7 @@
           <a:p>
             <a:pPr algn="ctr"/>
             <a:r>
-              <a:rPr sz="1600" b="1">
+              <a:rPr sz="1400" b="1">
                 <a:solidFill>
                   <a:srgbClr val="FFFFFF"/>
                 </a:solidFill>
@@ -18468,8 +18550,8 @@
         </p:nvSpPr>
         <p:spPr>
           <a:xfrm>
-            <a:off x="1450000" y="3835000"/>
-            <a:ext cx="10050000" cy="1147500"/>
+            <a:off x="1380000" y="3870000"/>
+            <a:ext cx="10150000" cy="1100000"/>
           </a:xfrm>
           <a:prstGeom prst="rect">
             <a:avLst/>
@@ -18477,12 +18559,11 @@
           <a:noFill/>
         </p:spPr>
         <p:txBody>
-          <a:bodyPr wrap="square" anchor="ctr" lIns="50800" rIns="50800">
+          <a:bodyPr wrap="square" anchor="ctr">
             <a:spAutoFit/>
           </a:bodyPr>
           <a:lstStyle/>
           <a:p>
-            <a:pPr algn="l"/>
             <a:r>
               <a:rPr sz="1400" b="0">
                 <a:solidFill>
@@ -18503,12 +18584,12 @@
         </p:nvSpPr>
         <p:spPr>
           <a:xfrm>
-            <a:off x="550000" y="5102500"/>
-            <a:ext cx="11100000" cy="1147500"/>
+            <a:off x="550000" y="5120000"/>
+            <a:ext cx="11100000" cy="1180000"/>
           </a:xfrm>
           <a:prstGeom prst="roundRect">
             <a:avLst>
-              <a:gd name="adj" fmla="val 18000"/>
+              <a:gd name="adj" fmla="val 8000"/>
             </a:avLst>
           </a:prstGeom>
           <a:solidFill>
@@ -18549,8 +18630,8 @@
         </p:nvSpPr>
         <p:spPr>
           <a:xfrm>
-            <a:off x="550000" y="5102500"/>
-            <a:ext cx="70000" cy="1147500"/>
+            <a:off x="550000" y="5120000"/>
+            <a:ext cx="70000" cy="1180000"/>
           </a:xfrm>
           <a:prstGeom prst="rect">
             <a:avLst/>
@@ -18593,8 +18674,8 @@
         </p:nvSpPr>
         <p:spPr>
           <a:xfrm>
-            <a:off x="800000" y="5446250"/>
-            <a:ext cx="460000" cy="460000"/>
+            <a:off x="780000" y="5500000"/>
+            <a:ext cx="420000" cy="420000"/>
           </a:xfrm>
           <a:prstGeom prst="ellipse">
             <a:avLst/>
@@ -18627,7 +18708,7 @@
           <a:p>
             <a:pPr algn="ctr"/>
             <a:r>
-              <a:rPr sz="1600" b="1">
+              <a:rPr sz="1400" b="1">
                 <a:solidFill>
                   <a:srgbClr val="FFFFFF"/>
                 </a:solidFill>
@@ -18646,8 +18727,8 @@
         </p:nvSpPr>
         <p:spPr>
           <a:xfrm>
-            <a:off x="1450000" y="5102500"/>
-            <a:ext cx="10050000" cy="1147500"/>
+            <a:off x="1380000" y="5160000"/>
+            <a:ext cx="10150000" cy="1100000"/>
           </a:xfrm>
           <a:prstGeom prst="rect">
             <a:avLst/>
@@ -18655,20 +18736,35 @@
           <a:noFill/>
         </p:spPr>
         <p:txBody>
-          <a:bodyPr wrap="square" anchor="ctr" lIns="50800" rIns="50800">
+          <a:bodyPr wrap="square" anchor="ctr">
             <a:spAutoFit/>
           </a:bodyPr>
           <a:lstStyle/>
           <a:p>
-            <a:pPr algn="l"/>
             <a:r>
-              <a:rPr sz="1400" b="0">
+              <a:rPr sz="1500" b="1">
                 <a:solidFill>
-                  <a:srgbClr val="1B2430"/>
+                  <a:srgbClr val="1F3A5F"/>
                 </a:solidFill>
                 <a:latin typeface="Calibri"/>
               </a:rPr>
-              <a:t>Neyromorf tizimlarning real afzalligi siyrak (sparse), hodisaga boy ish yuklamalarida namoyon bo'ladi: hodisali kameralar (DVS) bilan ko'rish, audio uyg'otuvchi so'z, sensor oqimlarida…</a:t>
+              <a:t>Neyromorf tizimlarning real afzalligi siyrak (sparse), hodisaga boy ish yuklamalarida namoyon bo'ladi: hodisali kameralar (DVS) bilan ko'rish, audio uyg'otuvchi so'z, sensor oqimlarida anomaliya, robot boshqaruvi.</a:t>
+            </a:r>
+          </a:p>
+          <a:p>
+            <a:pPr>
+              <a:spcBef>
+                <a:spcPts val="400"/>
+              </a:spcBef>
+            </a:pPr>
+            <a:r>
+              <a:rPr sz="1400">
+                <a:solidFill>
+                  <a:srgbClr val="334055"/>
+                </a:solidFill>
+                <a:latin typeface="Calibri"/>
+              </a:rPr>
+              <a:t>Intel ma'lumotlariga ko'ra, Loihi ayrim siyrak ish yuklamalarida GPU va CPU ga nisbatan 100–1000 baravar kam energiya sarflaydi, lekin zich matritsali katta modellarda (LLM) ustunlik yo'q.</a:t>
             </a:r>
           </a:p>
         </p:txBody>
@@ -22774,12 +22870,12 @@
         </p:nvSpPr>
         <p:spPr>
           <a:xfrm>
-            <a:off x="550000" y="1620000"/>
-            <a:ext cx="11100000" cy="1250000"/>
+            <a:off x="550000" y="1409780"/>
+            <a:ext cx="11100000" cy="1503480"/>
           </a:xfrm>
           <a:prstGeom prst="roundRect">
             <a:avLst>
-              <a:gd name="adj" fmla="val 18000"/>
+              <a:gd name="adj" fmla="val 8000"/>
             </a:avLst>
           </a:prstGeom>
           <a:solidFill>
@@ -22820,8 +22916,8 @@
         </p:nvSpPr>
         <p:spPr>
           <a:xfrm>
-            <a:off x="550000" y="1620000"/>
-            <a:ext cx="70000" cy="1250000"/>
+            <a:off x="550000" y="1409780"/>
+            <a:ext cx="70000" cy="1503480"/>
           </a:xfrm>
           <a:prstGeom prst="rect">
             <a:avLst/>
@@ -22864,8 +22960,8 @@
         </p:nvSpPr>
         <p:spPr>
           <a:xfrm>
-            <a:off x="800000" y="2015000"/>
-            <a:ext cx="460000" cy="460000"/>
+            <a:off x="780000" y="1951520"/>
+            <a:ext cx="420000" cy="420000"/>
           </a:xfrm>
           <a:prstGeom prst="ellipse">
             <a:avLst/>
@@ -22898,7 +22994,7 @@
           <a:p>
             <a:pPr algn="ctr"/>
             <a:r>
-              <a:rPr sz="1600" b="1">
+              <a:rPr sz="1400" b="1">
                 <a:solidFill>
                   <a:srgbClr val="FFFFFF"/>
                 </a:solidFill>
@@ -22917,8 +23013,8 @@
         </p:nvSpPr>
         <p:spPr>
           <a:xfrm>
-            <a:off x="1450000" y="1620000"/>
-            <a:ext cx="10050000" cy="1250000"/>
+            <a:off x="1380000" y="1449780"/>
+            <a:ext cx="10150000" cy="1423480"/>
           </a:xfrm>
           <a:prstGeom prst="rect">
             <a:avLst/>
@@ -22926,20 +23022,35 @@
           <a:noFill/>
         </p:spPr>
         <p:txBody>
-          <a:bodyPr wrap="square" anchor="ctr" lIns="50800" rIns="50800">
+          <a:bodyPr wrap="square" anchor="ctr">
             <a:spAutoFit/>
           </a:bodyPr>
           <a:lstStyle/>
           <a:p>
-            <a:pPr algn="l"/>
             <a:r>
-              <a:rPr sz="1600" b="0">
+              <a:rPr sz="1500" b="1">
                 <a:solidFill>
-                  <a:srgbClr val="1B2430"/>
+                  <a:srgbClr val="1F3A5F"/>
                 </a:solidFill>
                 <a:latin typeface="Calibri"/>
               </a:rPr>
-              <a:t>Kvant hisoblashning asosiy birligi kubit superpozitsiya va chalkashlik (entanglement) tufayli n kubit 2^n o'lchovli holat fazosini ifodalaydi. Kvant mashinali o'qitish (Quantum Machine Learning, QML; Biamonte va boshq., 2017) bu fazodan ikki asosiy usulda…</a:t>
+              <a:t>Kvant hisoblashning asosiy birligi kubit superpozitsiya va chalkashlik (entanglement) tufayli n kubit 2^n o'lchovli holat fazosini ifodalaydi.</a:t>
+            </a:r>
+          </a:p>
+          <a:p>
+            <a:pPr>
+              <a:spcBef>
+                <a:spcPts val="400"/>
+              </a:spcBef>
+            </a:pPr>
+            <a:r>
+              <a:rPr sz="1400">
+                <a:solidFill>
+                  <a:srgbClr val="334055"/>
+                </a:solidFill>
+                <a:latin typeface="Calibri"/>
+              </a:rPr>
+              <a:t>Kvant mashinali o'qitish (Quantum Machine Learning, QML; Biamonte va boshq., 2017) bu fazodan ikki asosiy usulda foydalanadi.</a:t>
             </a:r>
           </a:p>
         </p:txBody>
@@ -22952,12 +23063,12 @@
         </p:nvSpPr>
         <p:spPr>
           <a:xfrm>
-            <a:off x="550000" y="2990000"/>
-            <a:ext cx="11100000" cy="1250000"/>
+            <a:off x="550000" y="3023260"/>
+            <a:ext cx="11100000" cy="1503480"/>
           </a:xfrm>
           <a:prstGeom prst="roundRect">
             <a:avLst>
-              <a:gd name="adj" fmla="val 18000"/>
+              <a:gd name="adj" fmla="val 8000"/>
             </a:avLst>
           </a:prstGeom>
           <a:solidFill>
@@ -22998,8 +23109,8 @@
         </p:nvSpPr>
         <p:spPr>
           <a:xfrm>
-            <a:off x="550000" y="2990000"/>
-            <a:ext cx="70000" cy="1250000"/>
+            <a:off x="550000" y="3023260"/>
+            <a:ext cx="70000" cy="1503480"/>
           </a:xfrm>
           <a:prstGeom prst="rect">
             <a:avLst/>
@@ -23042,8 +23153,8 @@
         </p:nvSpPr>
         <p:spPr>
           <a:xfrm>
-            <a:off x="800000" y="3385000"/>
-            <a:ext cx="460000" cy="460000"/>
+            <a:off x="780000" y="3565000"/>
+            <a:ext cx="420000" cy="420000"/>
           </a:xfrm>
           <a:prstGeom prst="ellipse">
             <a:avLst/>
@@ -23076,7 +23187,7 @@
           <a:p>
             <a:pPr algn="ctr"/>
             <a:r>
-              <a:rPr sz="1600" b="1">
+              <a:rPr sz="1400" b="1">
                 <a:solidFill>
                   <a:srgbClr val="FFFFFF"/>
                 </a:solidFill>
@@ -23095,8 +23206,8 @@
         </p:nvSpPr>
         <p:spPr>
           <a:xfrm>
-            <a:off x="1450000" y="2990000"/>
-            <a:ext cx="10050000" cy="1250000"/>
+            <a:off x="1380000" y="3063260"/>
+            <a:ext cx="10150000" cy="1423480"/>
           </a:xfrm>
           <a:prstGeom prst="rect">
             <a:avLst/>
@@ -23104,22 +23215,37 @@
           <a:noFill/>
         </p:spPr>
         <p:txBody>
-          <a:bodyPr wrap="square" anchor="ctr" lIns="50800" rIns="50800">
+          <a:bodyPr wrap="square" anchor="ctr">
             <a:spAutoFit/>
           </a:bodyPr>
           <a:lstStyle/>
           <a:p>
-            <a:pPr algn="l"/>
             <a:r>
-              <a:rPr sz="1600" b="0">
+              <a:rPr sz="1500" b="1">
                 <a:solidFill>
-                  <a:srgbClr val="1B2430"/>
+                  <a:srgbClr val="1F3A5F"/>
                 </a:solidFill>
                 <a:latin typeface="Calibri"/>
               </a:rPr>
               <a:t>Joriy apparat holati (2025-yil holatiga): IBM Heron r2 prosessorlari 156 kubit, ikki kubitli eshik xatosi 0,3 % atrofida; IBM 2023-yilda 1 121 kubitli Condor ni ko'rsatdi, lekin strategiyani kubit sonidan sifatga burdi; Google 2024-yil dekabrida 105 kubitli…</a:t>
             </a:r>
           </a:p>
+          <a:p>
+            <a:pPr>
+              <a:spcBef>
+                <a:spcPts val="400"/>
+              </a:spcBef>
+            </a:pPr>
+            <a:r>
+              <a:rPr sz="1400">
+                <a:solidFill>
+                  <a:srgbClr val="334055"/>
+                </a:solidFill>
+                <a:latin typeface="Calibri"/>
+              </a:rPr>
+              <a:t>Bularning barchasi NISQ (Noisy Intermediate-Scale Quantum, Preskill 2018) davriga tegishli: xato tuzatilmagan, sxema chuqurligi cheklangan.</a:t>
+            </a:r>
+          </a:p>
         </p:txBody>
       </p:sp>
       <p:sp>
@@ -23130,12 +23256,12 @@
         </p:nvSpPr>
         <p:spPr>
           <a:xfrm>
-            <a:off x="550000" y="4360000"/>
-            <a:ext cx="11100000" cy="1250000"/>
+            <a:off x="550000" y="4636740"/>
+            <a:ext cx="11100000" cy="1503480"/>
           </a:xfrm>
           <a:prstGeom prst="roundRect">
             <a:avLst>
-              <a:gd name="adj" fmla="val 18000"/>
+              <a:gd name="adj" fmla="val 8000"/>
             </a:avLst>
           </a:prstGeom>
           <a:solidFill>
@@ -23176,8 +23302,8 @@
         </p:nvSpPr>
         <p:spPr>
           <a:xfrm>
-            <a:off x="550000" y="4360000"/>
-            <a:ext cx="70000" cy="1250000"/>
+            <a:off x="550000" y="4636740"/>
+            <a:ext cx="70000" cy="1503480"/>
           </a:xfrm>
           <a:prstGeom prst="rect">
             <a:avLst/>
@@ -23220,8 +23346,8 @@
         </p:nvSpPr>
         <p:spPr>
           <a:xfrm>
-            <a:off x="800000" y="4755000"/>
-            <a:ext cx="460000" cy="460000"/>
+            <a:off x="780000" y="5178480"/>
+            <a:ext cx="420000" cy="420000"/>
           </a:xfrm>
           <a:prstGeom prst="ellipse">
             <a:avLst/>
@@ -23254,7 +23380,7 @@
           <a:p>
             <a:pPr algn="ctr"/>
             <a:r>
-              <a:rPr sz="1600" b="1">
+              <a:rPr sz="1400" b="1">
                 <a:solidFill>
                   <a:srgbClr val="FFFFFF"/>
                 </a:solidFill>
@@ -23273,8 +23399,8 @@
         </p:nvSpPr>
         <p:spPr>
           <a:xfrm>
-            <a:off x="1450000" y="4360000"/>
-            <a:ext cx="10050000" cy="1250000"/>
+            <a:off x="1380000" y="4676740"/>
+            <a:ext cx="10150000" cy="1423480"/>
           </a:xfrm>
           <a:prstGeom prst="rect">
             <a:avLst/>
@@ -23282,20 +23408,35 @@
           <a:noFill/>
         </p:spPr>
         <p:txBody>
-          <a:bodyPr wrap="square" anchor="ctr" lIns="50800" rIns="50800">
+          <a:bodyPr wrap="square" anchor="ctr">
             <a:spAutoFit/>
           </a:bodyPr>
           <a:lstStyle/>
           <a:p>
-            <a:pPr algn="l"/>
             <a:r>
-              <a:rPr sz="1600" b="0">
+              <a:rPr sz="1500" b="1">
                 <a:solidFill>
-                  <a:srgbClr val="1B2430"/>
+                  <a:srgbClr val="1F3A5F"/>
                 </a:solidFill>
                 <a:latin typeface="Calibri"/>
               </a:rPr>
-              <a:t>QML uchun bu quyidagi amaliy xulosalarni beradi. Birinchidan, hali hech bir real SI masalasida kvant qurilma klassik GPU dan ustun kelgani isbotlanmagan; ko'p QML natijalari simulyatsiyada va kichik o'lchamli ma'lumotlarda olingan.</a:t>
+              <a:t>QML uchun bu quyidagi amaliy xulosalarni beradi.</a:t>
+            </a:r>
+          </a:p>
+          <a:p>
+            <a:pPr>
+              <a:spcBef>
+                <a:spcPts val="400"/>
+              </a:spcBef>
+            </a:pPr>
+            <a:r>
+              <a:rPr sz="1400">
+                <a:solidFill>
+                  <a:srgbClr val="334055"/>
+                </a:solidFill>
+                <a:latin typeface="Calibri"/>
+              </a:rPr>
+              <a:t>Birinchidan, hali hech bir real SI masalasida kvant qurilma klassik GPU dan ustun kelgani isbotlanmagan; ko'p QML natijalari simulyatsiyada va kichik o'lchamli ma'lumotlarda olingan.</a:t>
             </a:r>
           </a:p>
         </p:txBody>
@@ -25746,12 +25887,12 @@
         </p:nvSpPr>
         <p:spPr>
           <a:xfrm>
-            <a:off x="550000" y="1620000"/>
-            <a:ext cx="11100000" cy="1250000"/>
+            <a:off x="550000" y="2038430"/>
+            <a:ext cx="11100000" cy="1084380"/>
           </a:xfrm>
           <a:prstGeom prst="roundRect">
             <a:avLst>
-              <a:gd name="adj" fmla="val 18000"/>
+              <a:gd name="adj" fmla="val 8000"/>
             </a:avLst>
           </a:prstGeom>
           <a:solidFill>
@@ -25792,8 +25933,8 @@
         </p:nvSpPr>
         <p:spPr>
           <a:xfrm>
-            <a:off x="550000" y="1620000"/>
-            <a:ext cx="70000" cy="1250000"/>
+            <a:off x="550000" y="2038430"/>
+            <a:ext cx="70000" cy="1084380"/>
           </a:xfrm>
           <a:prstGeom prst="rect">
             <a:avLst/>
@@ -25836,8 +25977,8 @@
         </p:nvSpPr>
         <p:spPr>
           <a:xfrm>
-            <a:off x="800000" y="2015000"/>
-            <a:ext cx="460000" cy="460000"/>
+            <a:off x="780000" y="2370620"/>
+            <a:ext cx="420000" cy="420000"/>
           </a:xfrm>
           <a:prstGeom prst="ellipse">
             <a:avLst/>
@@ -25870,7 +26011,7 @@
           <a:p>
             <a:pPr algn="ctr"/>
             <a:r>
-              <a:rPr sz="1600" b="1">
+              <a:rPr sz="1400" b="1">
                 <a:solidFill>
                   <a:srgbClr val="FFFFFF"/>
                 </a:solidFill>
@@ -25889,8 +26030,8 @@
         </p:nvSpPr>
         <p:spPr>
           <a:xfrm>
-            <a:off x="1450000" y="1620000"/>
-            <a:ext cx="10050000" cy="1250000"/>
+            <a:off x="1380000" y="2078430"/>
+            <a:ext cx="10150000" cy="1004380"/>
           </a:xfrm>
           <a:prstGeom prst="rect">
             <a:avLst/>
@@ -25898,20 +26039,35 @@
           <a:noFill/>
         </p:spPr>
         <p:txBody>
-          <a:bodyPr wrap="square" anchor="ctr" lIns="50800" rIns="50800">
+          <a:bodyPr wrap="square" anchor="ctr">
             <a:spAutoFit/>
           </a:bodyPr>
           <a:lstStyle/>
           <a:p>
-            <a:pPr algn="l"/>
             <a:r>
-              <a:rPr sz="1600" b="0">
+              <a:rPr sz="1600" b="1">
                 <a:solidFill>
-                  <a:srgbClr val="1B2430"/>
+                  <a:srgbClr val="1F3A5F"/>
                 </a:solidFill>
                 <a:latin typeface="Calibri"/>
               </a:rPr>
-              <a:t>Fotonik SI tezlatkichlari g'oyasi oddiy: chiziqli algebra — matritsa-vektor ko'paytirish — yorug'lik interferensiyasi orqali amalga oshiriladi. Shen va boshq. (2017) MIT da Mach-Zender interferometrlari (MZI) to'ri yordamida istalgan unitar matritsani optik…</a:t>
+              <a:t>Fotonik SI tezlatkichlari g'oyasi oddiy: chiziqli algebra — matritsa-vektor ko'paytirish — yorug'lik interferensiyasi orqali amalga oshiriladi.</a:t>
+            </a:r>
+          </a:p>
+          <a:p>
+            <a:pPr>
+              <a:spcBef>
+                <a:spcPts val="400"/>
+              </a:spcBef>
+            </a:pPr>
+            <a:r>
+              <a:rPr sz="1500">
+                <a:solidFill>
+                  <a:srgbClr val="334055"/>
+                </a:solidFill>
+                <a:latin typeface="Calibri"/>
+              </a:rPr>
+              <a:t>Shen va boshq.</a:t>
             </a:r>
           </a:p>
         </p:txBody>
@@ -25924,12 +26080,12 @@
         </p:nvSpPr>
         <p:spPr>
           <a:xfrm>
-            <a:off x="550000" y="2990000"/>
-            <a:ext cx="11100000" cy="1250000"/>
+            <a:off x="550000" y="3232810"/>
+            <a:ext cx="11100000" cy="1084380"/>
           </a:xfrm>
           <a:prstGeom prst="roundRect">
             <a:avLst>
-              <a:gd name="adj" fmla="val 18000"/>
+              <a:gd name="adj" fmla="val 8000"/>
             </a:avLst>
           </a:prstGeom>
           <a:solidFill>
@@ -25970,8 +26126,8 @@
         </p:nvSpPr>
         <p:spPr>
           <a:xfrm>
-            <a:off x="550000" y="2990000"/>
-            <a:ext cx="70000" cy="1250000"/>
+            <a:off x="550000" y="3232810"/>
+            <a:ext cx="70000" cy="1084380"/>
           </a:xfrm>
           <a:prstGeom prst="rect">
             <a:avLst/>
@@ -26014,8 +26170,8 @@
         </p:nvSpPr>
         <p:spPr>
           <a:xfrm>
-            <a:off x="800000" y="3385000"/>
-            <a:ext cx="460000" cy="460000"/>
+            <a:off x="780000" y="3565000"/>
+            <a:ext cx="420000" cy="420000"/>
           </a:xfrm>
           <a:prstGeom prst="ellipse">
             <a:avLst/>
@@ -26048,7 +26204,7 @@
           <a:p>
             <a:pPr algn="ctr"/>
             <a:r>
-              <a:rPr sz="1600" b="1">
+              <a:rPr sz="1400" b="1">
                 <a:solidFill>
                   <a:srgbClr val="FFFFFF"/>
                 </a:solidFill>
@@ -26067,8 +26223,8 @@
         </p:nvSpPr>
         <p:spPr>
           <a:xfrm>
-            <a:off x="1450000" y="2990000"/>
-            <a:ext cx="10050000" cy="1250000"/>
+            <a:off x="1380000" y="3272810"/>
+            <a:ext cx="10150000" cy="1004380"/>
           </a:xfrm>
           <a:prstGeom prst="rect">
             <a:avLst/>
@@ -26076,20 +26232,19 @@
           <a:noFill/>
         </p:spPr>
         <p:txBody>
-          <a:bodyPr wrap="square" anchor="ctr" lIns="50800" rIns="50800">
+          <a:bodyPr wrap="square" anchor="ctr">
             <a:spAutoFit/>
           </a:bodyPr>
           <a:lstStyle/>
           <a:p>
-            <a:pPr algn="l"/>
             <a:r>
-              <a:rPr sz="1600" b="0">
+              <a:rPr sz="1500" b="0">
                 <a:solidFill>
                   <a:srgbClr val="1B2430"/>
                 </a:solidFill>
                 <a:latin typeface="Calibri"/>
               </a:rPr>
-              <a:t>Tijorat holati: Lightmatter kompaniyasi Envise fotonik tezlatkichi va Passage optik interkonnektini ishlab chiqdi va 2024-yilda 4 milliard dollardan ortiq baholandi; Lightelligence, Celestial AI va boshqalar ham shu yo'nalishda. Muhim kuzatuv: fotonikaning…</a:t>
+              <a:t>Tijorat holati: Lightmatter kompaniyasi Envise fotonik tezlatkichi va Passage optik interkonnektini ishlab chiqdi va 2024-yilda 4 milliard dollardan ortiq baholandi; Lightelligence, Celestial AI va boshqalar ham shu yo'nalishda.</a:t>
             </a:r>
           </a:p>
         </p:txBody>
@@ -26102,12 +26257,12 @@
         </p:nvSpPr>
         <p:spPr>
           <a:xfrm>
-            <a:off x="550000" y="4360000"/>
-            <a:ext cx="11100000" cy="1250000"/>
+            <a:off x="550000" y="4427190"/>
+            <a:ext cx="11100000" cy="1084380"/>
           </a:xfrm>
           <a:prstGeom prst="roundRect">
             <a:avLst>
-              <a:gd name="adj" fmla="val 18000"/>
+              <a:gd name="adj" fmla="val 8000"/>
             </a:avLst>
           </a:prstGeom>
           <a:solidFill>
@@ -26148,8 +26303,8 @@
         </p:nvSpPr>
         <p:spPr>
           <a:xfrm>
-            <a:off x="550000" y="4360000"/>
-            <a:ext cx="70000" cy="1250000"/>
+            <a:off x="550000" y="4427190"/>
+            <a:ext cx="70000" cy="1084380"/>
           </a:xfrm>
           <a:prstGeom prst="rect">
             <a:avLst/>
@@ -26192,8 +26347,8 @@
         </p:nvSpPr>
         <p:spPr>
           <a:xfrm>
-            <a:off x="800000" y="4755000"/>
-            <a:ext cx="460000" cy="460000"/>
+            <a:off x="780000" y="4759380"/>
+            <a:ext cx="420000" cy="420000"/>
           </a:xfrm>
           <a:prstGeom prst="ellipse">
             <a:avLst/>
@@ -26226,7 +26381,7 @@
           <a:p>
             <a:pPr algn="ctr"/>
             <a:r>
-              <a:rPr sz="1600" b="1">
+              <a:rPr sz="1400" b="1">
                 <a:solidFill>
                   <a:srgbClr val="FFFFFF"/>
                 </a:solidFill>
@@ -26245,8 +26400,8 @@
         </p:nvSpPr>
         <p:spPr>
           <a:xfrm>
-            <a:off x="1450000" y="4360000"/>
-            <a:ext cx="10050000" cy="1250000"/>
+            <a:off x="1380000" y="4467190"/>
+            <a:ext cx="10150000" cy="1004380"/>
           </a:xfrm>
           <a:prstGeom prst="rect">
             <a:avLst/>
@@ -26254,20 +26409,19 @@
           <a:noFill/>
         </p:spPr>
         <p:txBody>
-          <a:bodyPr wrap="square" anchor="ctr" lIns="50800" rIns="50800">
+          <a:bodyPr wrap="square" anchor="ctr">
             <a:spAutoFit/>
           </a:bodyPr>
           <a:lstStyle/>
           <a:p>
-            <a:pPr algn="l"/>
             <a:r>
-              <a:rPr sz="1600" b="0">
+              <a:rPr sz="1500" b="0">
                 <a:solidFill>
                   <a:srgbClr val="1B2430"/>
                 </a:solidFill>
                 <a:latin typeface="Calibri"/>
               </a:rPr>
-              <a:t>Fotonik hisoblashning cheklovlari: analog aniqlik (odatda 4–8 bit samarali), nochiziqli faollashtirish funksiyalari uchun elektr domeniga qaytish zarurati (elektro-optik konvertatsiya…</a:t>
+              <a:t>Fotonik hisoblashning cheklovlari: analog aniqlik (odatda 4–8 bit samarali), nochiziqli faollashtirish funksiyalari uchun elektr domeniga qaytish zarurati (elektro-optik konvertatsiya energiya va kechikish qo'shadi), haroratga sezgirlik va ishlab chiqarish…</a:t>
             </a:r>
           </a:p>
         </p:txBody>
